--- a/TextPP.pptx
+++ b/TextPP.pptx
@@ -111,6 +111,11 @@
       </a:defRPr>
     </a:lvl9pPr>
   </p:defaultTextStyle>
+  <p:extLst>
+    <p:ext uri="{EFAFB233-063F-42B5-8137-9DF3F51BA10A}">
+      <p15:sldGuideLst xmlns:p15="http://schemas.microsoft.com/office/powerpoint/2012/main"/>
+    </p:ext>
+  </p:extLst>
 </p:presentation>
 </file>
 
@@ -196,7 +201,7 @@
           <a:p>
             <a:fld id="{898EB68F-04AF-4D3B-BEE9-80DDBA87228A}" type="datetimeFigureOut">
               <a:rPr lang="en-US" smtClean="0"/>
-              <a:t>11/29/2025</a:t>
+              <a:t>12/6/2025</a:t>
             </a:fld>
             <a:endParaRPr lang="en-US"/>
           </a:p>
@@ -509,15 +514,7 @@
           <a:p>
             <a:r>
               <a:rPr lang="en-US" dirty="0"/>
-              <a:t>Now that we have our dataset, my role as the text mining analyst was to dive into the thousands of wine descriptions to find out what language separates a good wine from a great wine. I used a two-part approach first using TF-IDF analysis to identify important words for each quality tier. Then to gain more information on how </a:t>
-            </a:r>
-            <a:r>
-              <a:rPr lang="en-US" dirty="0" err="1"/>
-              <a:t>ofter</a:t>
-            </a:r>
-            <a:r>
-              <a:rPr lang="en-US" dirty="0"/>
-              <a:t> the words were used I did a word frequency analysis to show exactly how the usage of the terms change with quality. </a:t>
+              <a:t>Now that we have our dataset, my role as the text mining analyst was to dive into the thousands of wine descriptions to find out what language separates a good wine from a great wine. I used a two-part approach first using TF-IDF analysis to identify important words for each quality tier. Then to gain more information on how often the words were used I did a word frequency analysis to show exactly how the usage of the terms change with quality. </a:t>
             </a:r>
           </a:p>
         </p:txBody>
@@ -1069,7 +1066,7 @@
           <a:p>
             <a:fld id="{A7747881-2BB7-4D53-BF30-C43B8AE31978}" type="datetimeFigureOut">
               <a:rPr lang="en-US" smtClean="0"/>
-              <a:t>11/28/2025</a:t>
+              <a:t>12/6/2025</a:t>
             </a:fld>
             <a:endParaRPr lang="en-US"/>
           </a:p>
@@ -1267,7 +1264,7 @@
           <a:p>
             <a:fld id="{A7747881-2BB7-4D53-BF30-C43B8AE31978}" type="datetimeFigureOut">
               <a:rPr lang="en-US" smtClean="0"/>
-              <a:t>11/28/2025</a:t>
+              <a:t>12/6/2025</a:t>
             </a:fld>
             <a:endParaRPr lang="en-US"/>
           </a:p>
@@ -1475,7 +1472,7 @@
           <a:p>
             <a:fld id="{A7747881-2BB7-4D53-BF30-C43B8AE31978}" type="datetimeFigureOut">
               <a:rPr lang="en-US" smtClean="0"/>
-              <a:t>11/28/2025</a:t>
+              <a:t>12/6/2025</a:t>
             </a:fld>
             <a:endParaRPr lang="en-US"/>
           </a:p>
@@ -1673,7 +1670,7 @@
           <a:p>
             <a:fld id="{A7747881-2BB7-4D53-BF30-C43B8AE31978}" type="datetimeFigureOut">
               <a:rPr lang="en-US" smtClean="0"/>
-              <a:t>11/28/2025</a:t>
+              <a:t>12/6/2025</a:t>
             </a:fld>
             <a:endParaRPr lang="en-US"/>
           </a:p>
@@ -1948,7 +1945,7 @@
           <a:p>
             <a:fld id="{A7747881-2BB7-4D53-BF30-C43B8AE31978}" type="datetimeFigureOut">
               <a:rPr lang="en-US" smtClean="0"/>
-              <a:t>11/28/2025</a:t>
+              <a:t>12/6/2025</a:t>
             </a:fld>
             <a:endParaRPr lang="en-US"/>
           </a:p>
@@ -2213,7 +2210,7 @@
           <a:p>
             <a:fld id="{A7747881-2BB7-4D53-BF30-C43B8AE31978}" type="datetimeFigureOut">
               <a:rPr lang="en-US" smtClean="0"/>
-              <a:t>11/28/2025</a:t>
+              <a:t>12/6/2025</a:t>
             </a:fld>
             <a:endParaRPr lang="en-US"/>
           </a:p>
@@ -2625,7 +2622,7 @@
           <a:p>
             <a:fld id="{A7747881-2BB7-4D53-BF30-C43B8AE31978}" type="datetimeFigureOut">
               <a:rPr lang="en-US" smtClean="0"/>
-              <a:t>11/28/2025</a:t>
+              <a:t>12/6/2025</a:t>
             </a:fld>
             <a:endParaRPr lang="en-US"/>
           </a:p>
@@ -2766,7 +2763,7 @@
           <a:p>
             <a:fld id="{A7747881-2BB7-4D53-BF30-C43B8AE31978}" type="datetimeFigureOut">
               <a:rPr lang="en-US" smtClean="0"/>
-              <a:t>11/28/2025</a:t>
+              <a:t>12/6/2025</a:t>
             </a:fld>
             <a:endParaRPr lang="en-US"/>
           </a:p>
@@ -2879,7 +2876,7 @@
           <a:p>
             <a:fld id="{A7747881-2BB7-4D53-BF30-C43B8AE31978}" type="datetimeFigureOut">
               <a:rPr lang="en-US" smtClean="0"/>
-              <a:t>11/28/2025</a:t>
+              <a:t>12/6/2025</a:t>
             </a:fld>
             <a:endParaRPr lang="en-US"/>
           </a:p>
@@ -3190,7 +3187,7 @@
           <a:p>
             <a:fld id="{A7747881-2BB7-4D53-BF30-C43B8AE31978}" type="datetimeFigureOut">
               <a:rPr lang="en-US" smtClean="0"/>
-              <a:t>11/28/2025</a:t>
+              <a:t>12/6/2025</a:t>
             </a:fld>
             <a:endParaRPr lang="en-US"/>
           </a:p>
@@ -3478,7 +3475,7 @@
           <a:p>
             <a:fld id="{A7747881-2BB7-4D53-BF30-C43B8AE31978}" type="datetimeFigureOut">
               <a:rPr lang="en-US" smtClean="0"/>
-              <a:t>11/28/2025</a:t>
+              <a:t>12/6/2025</a:t>
             </a:fld>
             <a:endParaRPr lang="en-US"/>
           </a:p>
@@ -3719,7 +3716,7 @@
           <a:p>
             <a:fld id="{A7747881-2BB7-4D53-BF30-C43B8AE31978}" type="datetimeFigureOut">
               <a:rPr lang="en-US" smtClean="0"/>
-              <a:t>11/28/2025</a:t>
+              <a:t>12/6/2025</a:t>
             </a:fld>
             <a:endParaRPr lang="en-US"/>
           </a:p>
@@ -4252,7 +4249,7 @@
           <p:nvPr/>
         </p:nvPicPr>
         <p:blipFill>
-          <a:blip r:embed="rId3">
+          <a:blip r:embed="rId5">
             <a:extLst>
               <a:ext uri="{28A0092B-C50C-407E-A947-70E740481C1C}">
                 <a14:useLocalDpi xmlns:a14="http://schemas.microsoft.com/office/drawing/2010/main" val="0"/>
@@ -4299,7 +4296,7 @@
           <p:nvPr/>
         </p:nvPicPr>
         <p:blipFill>
-          <a:blip r:embed="rId4">
+          <a:blip r:embed="rId6">
             <a:extLst>
               <a:ext uri="{28A0092B-C50C-407E-A947-70E740481C1C}">
                 <a14:useLocalDpi xmlns:a14="http://schemas.microsoft.com/office/drawing/2010/main" val="0"/>
@@ -4331,6 +4328,44 @@
           </a:extLst>
         </p:spPr>
       </p:pic>
+      <p:pic>
+        <p:nvPicPr>
+          <p:cNvPr id="2" name="Recorded Sound">
+            <a:hlinkClick r:id="" action="ppaction://media"/>
+            <a:extLst>
+              <a:ext uri="{FF2B5EF4-FFF2-40B4-BE49-F238E27FC236}">
+                <a16:creationId xmlns:a16="http://schemas.microsoft.com/office/drawing/2014/main" id="{3C530305-021B-FD31-4810-0F67F9D4A1E4}"/>
+              </a:ext>
+            </a:extLst>
+          </p:cNvPr>
+          <p:cNvPicPr>
+            <a:picLocks noChangeAspect="1"/>
+          </p:cNvPicPr>
+          <p:nvPr>
+            <a:audioFile r:link="rId2"/>
+            <p:extLst>
+              <p:ext uri="{DAA4B4D4-6D71-4841-9C94-3DE7FCFB9230}">
+                <p14:media xmlns:p14="http://schemas.microsoft.com/office/powerpoint/2010/main" r:embed="rId1"/>
+              </p:ext>
+            </p:extLst>
+          </p:nvPr>
+        </p:nvPicPr>
+        <p:blipFill>
+          <a:blip r:embed="rId7"/>
+          <a:stretch>
+            <a:fillRect/>
+          </a:stretch>
+        </p:blipFill>
+        <p:spPr>
+          <a:xfrm>
+            <a:off x="8524667" y="649713"/>
+            <a:ext cx="609600" cy="609600"/>
+          </a:xfrm>
+          <a:prstGeom prst="rect">
+            <a:avLst/>
+          </a:prstGeom>
+        </p:spPr>
+      </p:pic>
     </p:spTree>
     <p:extLst>
       <p:ext uri="{BB962C8B-B14F-4D97-AF65-F5344CB8AC3E}">
@@ -4341,6 +4376,90 @@
   <p:clrMapOvr>
     <a:masterClrMapping/>
   </p:clrMapOvr>
+  <p:timing>
+    <p:tnLst>
+      <p:par>
+        <p:cTn id="1" dur="indefinite" restart="never" nodeType="tmRoot">
+          <p:childTnLst>
+            <p:seq concurrent="1" nextAc="seek">
+              <p:cTn id="2" dur="indefinite" nodeType="mainSeq">
+                <p:childTnLst>
+                  <p:par>
+                    <p:cTn id="3" fill="hold">
+                      <p:stCondLst>
+                        <p:cond delay="indefinite"/>
+                      </p:stCondLst>
+                      <p:childTnLst>
+                        <p:par>
+                          <p:cTn id="4" fill="hold">
+                            <p:stCondLst>
+                              <p:cond delay="0"/>
+                            </p:stCondLst>
+                            <p:childTnLst>
+                              <p:par>
+                                <p:cTn id="5" presetID="1" presetClass="mediacall" presetSubtype="0" fill="hold" nodeType="clickEffect">
+                                  <p:stCondLst>
+                                    <p:cond delay="0"/>
+                                  </p:stCondLst>
+                                  <p:childTnLst>
+                                    <p:cmd type="call" cmd="playFrom(0.0)">
+                                      <p:cBhvr>
+                                        <p:cTn id="6" dur="36038" fill="hold"/>
+                                        <p:tgtEl>
+                                          <p:spTgt spid="2"/>
+                                        </p:tgtEl>
+                                      </p:cBhvr>
+                                    </p:cmd>
+                                  </p:childTnLst>
+                                </p:cTn>
+                              </p:par>
+                            </p:childTnLst>
+                          </p:cTn>
+                        </p:par>
+                      </p:childTnLst>
+                    </p:cTn>
+                  </p:par>
+                </p:childTnLst>
+              </p:cTn>
+              <p:prevCondLst>
+                <p:cond evt="onPrev" delay="0">
+                  <p:tgtEl>
+                    <p:sldTgt/>
+                  </p:tgtEl>
+                </p:cond>
+              </p:prevCondLst>
+              <p:nextCondLst>
+                <p:cond evt="onNext" delay="0">
+                  <p:tgtEl>
+                    <p:sldTgt/>
+                  </p:tgtEl>
+                </p:cond>
+              </p:nextCondLst>
+            </p:seq>
+            <p:audio>
+              <p:cMediaNode vol="80000">
+                <p:cTn id="7" fill="hold" display="0">
+                  <p:stCondLst>
+                    <p:cond delay="indefinite"/>
+                  </p:stCondLst>
+                  <p:endCondLst>
+                    <p:cond evt="onStopAudio" delay="0">
+                      <p:tgtEl>
+                        <p:sldTgt/>
+                      </p:tgtEl>
+                    </p:cond>
+                  </p:endCondLst>
+                </p:cTn>
+                <p:tgtEl>
+                  <p:spTgt spid="2"/>
+                </p:tgtEl>
+              </p:cMediaNode>
+            </p:audio>
+          </p:childTnLst>
+        </p:cTn>
+      </p:par>
+    </p:tnLst>
+  </p:timing>
 </p:sld>
 </file>
 
@@ -4407,7 +4526,7 @@
           </p:nvPr>
         </p:nvPicPr>
         <p:blipFill>
-          <a:blip r:embed="rId3">
+          <a:blip r:embed="rId5">
             <a:extLst>
               <a:ext uri="{28A0092B-C50C-407E-A947-70E740481C1C}">
                 <a14:useLocalDpi xmlns:a14="http://schemas.microsoft.com/office/drawing/2010/main" val="0"/>
@@ -4425,6 +4544,44 @@
           </a:xfrm>
         </p:spPr>
       </p:pic>
+      <p:pic>
+        <p:nvPicPr>
+          <p:cNvPr id="3" name="Recorded Sound">
+            <a:hlinkClick r:id="" action="ppaction://media"/>
+            <a:extLst>
+              <a:ext uri="{FF2B5EF4-FFF2-40B4-BE49-F238E27FC236}">
+                <a16:creationId xmlns:a16="http://schemas.microsoft.com/office/drawing/2014/main" id="{A86E1BD6-F5C6-D06F-0642-23F3370F4EEA}"/>
+              </a:ext>
+            </a:extLst>
+          </p:cNvPr>
+          <p:cNvPicPr>
+            <a:picLocks noChangeAspect="1"/>
+          </p:cNvPicPr>
+          <p:nvPr>
+            <a:audioFile r:link="rId2"/>
+            <p:extLst>
+              <p:ext uri="{DAA4B4D4-6D71-4841-9C94-3DE7FCFB9230}">
+                <p14:media xmlns:p14="http://schemas.microsoft.com/office/powerpoint/2010/main" r:embed="rId1"/>
+              </p:ext>
+            </p:extLst>
+          </p:nvPr>
+        </p:nvPicPr>
+        <p:blipFill>
+          <a:blip r:embed="rId6"/>
+          <a:stretch>
+            <a:fillRect/>
+          </a:stretch>
+        </p:blipFill>
+        <p:spPr>
+          <a:xfrm>
+            <a:off x="8281736" y="723106"/>
+            <a:ext cx="609600" cy="609600"/>
+          </a:xfrm>
+          <a:prstGeom prst="rect">
+            <a:avLst/>
+          </a:prstGeom>
+        </p:spPr>
+      </p:pic>
     </p:spTree>
     <p:extLst>
       <p:ext uri="{BB962C8B-B14F-4D97-AF65-F5344CB8AC3E}">
@@ -4435,6 +4592,90 @@
   <p:clrMapOvr>
     <a:masterClrMapping/>
   </p:clrMapOvr>
+  <p:timing>
+    <p:tnLst>
+      <p:par>
+        <p:cTn id="1" dur="indefinite" restart="never" nodeType="tmRoot">
+          <p:childTnLst>
+            <p:seq concurrent="1" nextAc="seek">
+              <p:cTn id="2" dur="indefinite" nodeType="mainSeq">
+                <p:childTnLst>
+                  <p:par>
+                    <p:cTn id="3" fill="hold">
+                      <p:stCondLst>
+                        <p:cond delay="indefinite"/>
+                      </p:stCondLst>
+                      <p:childTnLst>
+                        <p:par>
+                          <p:cTn id="4" fill="hold">
+                            <p:stCondLst>
+                              <p:cond delay="0"/>
+                            </p:stCondLst>
+                            <p:childTnLst>
+                              <p:par>
+                                <p:cTn id="5" presetID="1" presetClass="mediacall" presetSubtype="0" fill="hold" nodeType="clickEffect">
+                                  <p:stCondLst>
+                                    <p:cond delay="0"/>
+                                  </p:stCondLst>
+                                  <p:childTnLst>
+                                    <p:cmd type="call" cmd="playFrom(0.0)">
+                                      <p:cBhvr>
+                                        <p:cTn id="6" dur="28911" fill="hold"/>
+                                        <p:tgtEl>
+                                          <p:spTgt spid="3"/>
+                                        </p:tgtEl>
+                                      </p:cBhvr>
+                                    </p:cmd>
+                                  </p:childTnLst>
+                                </p:cTn>
+                              </p:par>
+                            </p:childTnLst>
+                          </p:cTn>
+                        </p:par>
+                      </p:childTnLst>
+                    </p:cTn>
+                  </p:par>
+                </p:childTnLst>
+              </p:cTn>
+              <p:prevCondLst>
+                <p:cond evt="onPrev" delay="0">
+                  <p:tgtEl>
+                    <p:sldTgt/>
+                  </p:tgtEl>
+                </p:cond>
+              </p:prevCondLst>
+              <p:nextCondLst>
+                <p:cond evt="onNext" delay="0">
+                  <p:tgtEl>
+                    <p:sldTgt/>
+                  </p:tgtEl>
+                </p:cond>
+              </p:nextCondLst>
+            </p:seq>
+            <p:audio>
+              <p:cMediaNode vol="80000">
+                <p:cTn id="7" fill="hold" display="0">
+                  <p:stCondLst>
+                    <p:cond delay="indefinite"/>
+                  </p:stCondLst>
+                  <p:endCondLst>
+                    <p:cond evt="onStopAudio" delay="0">
+                      <p:tgtEl>
+                        <p:sldTgt/>
+                      </p:tgtEl>
+                    </p:cond>
+                  </p:endCondLst>
+                </p:cTn>
+                <p:tgtEl>
+                  <p:spTgt spid="3"/>
+                </p:tgtEl>
+              </p:cMediaNode>
+            </p:audio>
+          </p:childTnLst>
+        </p:cTn>
+      </p:par>
+    </p:tnLst>
+  </p:timing>
 </p:sld>
 </file>
 
@@ -4501,7 +4742,7 @@
           </p:nvPr>
         </p:nvPicPr>
         <p:blipFill>
-          <a:blip r:embed="rId3">
+          <a:blip r:embed="rId5">
             <a:extLst>
               <a:ext uri="{28A0092B-C50C-407E-A947-70E740481C1C}">
                 <a14:useLocalDpi xmlns:a14="http://schemas.microsoft.com/office/drawing/2010/main" val="0"/>
@@ -4519,6 +4760,44 @@
           </a:xfrm>
         </p:spPr>
       </p:pic>
+      <p:pic>
+        <p:nvPicPr>
+          <p:cNvPr id="3" name="Recorded Sound">
+            <a:hlinkClick r:id="" action="ppaction://media"/>
+            <a:extLst>
+              <a:ext uri="{FF2B5EF4-FFF2-40B4-BE49-F238E27FC236}">
+                <a16:creationId xmlns:a16="http://schemas.microsoft.com/office/drawing/2014/main" id="{CCF8333F-5025-7F5F-02BA-8834415965CE}"/>
+              </a:ext>
+            </a:extLst>
+          </p:cNvPr>
+          <p:cNvPicPr>
+            <a:picLocks noChangeAspect="1"/>
+          </p:cNvPicPr>
+          <p:nvPr>
+            <a:audioFile r:link="rId2"/>
+            <p:extLst>
+              <p:ext uri="{DAA4B4D4-6D71-4841-9C94-3DE7FCFB9230}">
+                <p14:media xmlns:p14="http://schemas.microsoft.com/office/powerpoint/2010/main" r:embed="rId1"/>
+              </p:ext>
+            </p:extLst>
+          </p:nvPr>
+        </p:nvPicPr>
+        <p:blipFill>
+          <a:blip r:embed="rId6"/>
+          <a:stretch>
+            <a:fillRect/>
+          </a:stretch>
+        </p:blipFill>
+        <p:spPr>
+          <a:xfrm>
+            <a:off x="8546432" y="723106"/>
+            <a:ext cx="609600" cy="609600"/>
+          </a:xfrm>
+          <a:prstGeom prst="rect">
+            <a:avLst/>
+          </a:prstGeom>
+        </p:spPr>
+      </p:pic>
     </p:spTree>
     <p:extLst>
       <p:ext uri="{BB962C8B-B14F-4D97-AF65-F5344CB8AC3E}">
@@ -4529,6 +4808,90 @@
   <p:clrMapOvr>
     <a:masterClrMapping/>
   </p:clrMapOvr>
+  <p:timing>
+    <p:tnLst>
+      <p:par>
+        <p:cTn id="1" dur="indefinite" restart="never" nodeType="tmRoot">
+          <p:childTnLst>
+            <p:seq concurrent="1" nextAc="seek">
+              <p:cTn id="2" dur="indefinite" nodeType="mainSeq">
+                <p:childTnLst>
+                  <p:par>
+                    <p:cTn id="3" fill="hold">
+                      <p:stCondLst>
+                        <p:cond delay="indefinite"/>
+                      </p:stCondLst>
+                      <p:childTnLst>
+                        <p:par>
+                          <p:cTn id="4" fill="hold">
+                            <p:stCondLst>
+                              <p:cond delay="0"/>
+                            </p:stCondLst>
+                            <p:childTnLst>
+                              <p:par>
+                                <p:cTn id="5" presetID="1" presetClass="mediacall" presetSubtype="0" fill="hold" nodeType="clickEffect">
+                                  <p:stCondLst>
+                                    <p:cond delay="0"/>
+                                  </p:stCondLst>
+                                  <p:childTnLst>
+                                    <p:cmd type="call" cmd="playFrom(0.0)">
+                                      <p:cBhvr>
+                                        <p:cTn id="6" dur="47486" fill="hold"/>
+                                        <p:tgtEl>
+                                          <p:spTgt spid="3"/>
+                                        </p:tgtEl>
+                                      </p:cBhvr>
+                                    </p:cmd>
+                                  </p:childTnLst>
+                                </p:cTn>
+                              </p:par>
+                            </p:childTnLst>
+                          </p:cTn>
+                        </p:par>
+                      </p:childTnLst>
+                    </p:cTn>
+                  </p:par>
+                </p:childTnLst>
+              </p:cTn>
+              <p:prevCondLst>
+                <p:cond evt="onPrev" delay="0">
+                  <p:tgtEl>
+                    <p:sldTgt/>
+                  </p:tgtEl>
+                </p:cond>
+              </p:prevCondLst>
+              <p:nextCondLst>
+                <p:cond evt="onNext" delay="0">
+                  <p:tgtEl>
+                    <p:sldTgt/>
+                  </p:tgtEl>
+                </p:cond>
+              </p:nextCondLst>
+            </p:seq>
+            <p:audio>
+              <p:cMediaNode vol="80000">
+                <p:cTn id="7" fill="hold" display="0">
+                  <p:stCondLst>
+                    <p:cond delay="indefinite"/>
+                  </p:stCondLst>
+                  <p:endCondLst>
+                    <p:cond evt="onStopAudio" delay="0">
+                      <p:tgtEl>
+                        <p:sldTgt/>
+                      </p:tgtEl>
+                    </p:cond>
+                  </p:endCondLst>
+                </p:cTn>
+                <p:tgtEl>
+                  <p:spTgt spid="3"/>
+                </p:tgtEl>
+              </p:cMediaNode>
+            </p:audio>
+          </p:childTnLst>
+        </p:cTn>
+      </p:par>
+    </p:tnLst>
+  </p:timing>
 </p:sld>
 </file>
 
@@ -4595,7 +4958,7 @@
           </p:nvPr>
         </p:nvPicPr>
         <p:blipFill>
-          <a:blip r:embed="rId3">
+          <a:blip r:embed="rId5">
             <a:extLst>
               <a:ext uri="{28A0092B-C50C-407E-A947-70E740481C1C}">
                 <a14:useLocalDpi xmlns:a14="http://schemas.microsoft.com/office/drawing/2010/main" val="0"/>
@@ -4613,6 +4976,44 @@
           </a:xfrm>
         </p:spPr>
       </p:pic>
+      <p:pic>
+        <p:nvPicPr>
+          <p:cNvPr id="3" name="Recorded Sound">
+            <a:hlinkClick r:id="" action="ppaction://media"/>
+            <a:extLst>
+              <a:ext uri="{FF2B5EF4-FFF2-40B4-BE49-F238E27FC236}">
+                <a16:creationId xmlns:a16="http://schemas.microsoft.com/office/drawing/2014/main" id="{D4522473-BD93-AA0C-664E-C964B594E6E5}"/>
+              </a:ext>
+            </a:extLst>
+          </p:cNvPr>
+          <p:cNvPicPr>
+            <a:picLocks noChangeAspect="1"/>
+          </p:cNvPicPr>
+          <p:nvPr>
+            <a:audioFile r:link="rId2"/>
+            <p:extLst>
+              <p:ext uri="{DAA4B4D4-6D71-4841-9C94-3DE7FCFB9230}">
+                <p14:media xmlns:p14="http://schemas.microsoft.com/office/powerpoint/2010/main" r:embed="rId1"/>
+              </p:ext>
+            </p:extLst>
+          </p:nvPr>
+        </p:nvPicPr>
+        <p:blipFill>
+          <a:blip r:embed="rId6"/>
+          <a:stretch>
+            <a:fillRect/>
+          </a:stretch>
+        </p:blipFill>
+        <p:spPr>
+          <a:xfrm>
+            <a:off x="8522369" y="515998"/>
+            <a:ext cx="609600" cy="609600"/>
+          </a:xfrm>
+          <a:prstGeom prst="rect">
+            <a:avLst/>
+          </a:prstGeom>
+        </p:spPr>
+      </p:pic>
     </p:spTree>
     <p:extLst>
       <p:ext uri="{BB962C8B-B14F-4D97-AF65-F5344CB8AC3E}">
@@ -4623,6 +5024,90 @@
   <p:clrMapOvr>
     <a:masterClrMapping/>
   </p:clrMapOvr>
+  <p:timing>
+    <p:tnLst>
+      <p:par>
+        <p:cTn id="1" dur="indefinite" restart="never" nodeType="tmRoot">
+          <p:childTnLst>
+            <p:seq concurrent="1" nextAc="seek">
+              <p:cTn id="2" dur="indefinite" nodeType="mainSeq">
+                <p:childTnLst>
+                  <p:par>
+                    <p:cTn id="3" fill="hold">
+                      <p:stCondLst>
+                        <p:cond delay="indefinite"/>
+                      </p:stCondLst>
+                      <p:childTnLst>
+                        <p:par>
+                          <p:cTn id="4" fill="hold">
+                            <p:stCondLst>
+                              <p:cond delay="0"/>
+                            </p:stCondLst>
+                            <p:childTnLst>
+                              <p:par>
+                                <p:cTn id="5" presetID="1" presetClass="mediacall" presetSubtype="0" fill="hold" nodeType="clickEffect">
+                                  <p:stCondLst>
+                                    <p:cond delay="0"/>
+                                  </p:stCondLst>
+                                  <p:childTnLst>
+                                    <p:cmd type="call" cmd="playFrom(0.0)">
+                                      <p:cBhvr>
+                                        <p:cTn id="6" dur="36322" fill="hold"/>
+                                        <p:tgtEl>
+                                          <p:spTgt spid="3"/>
+                                        </p:tgtEl>
+                                      </p:cBhvr>
+                                    </p:cmd>
+                                  </p:childTnLst>
+                                </p:cTn>
+                              </p:par>
+                            </p:childTnLst>
+                          </p:cTn>
+                        </p:par>
+                      </p:childTnLst>
+                    </p:cTn>
+                  </p:par>
+                </p:childTnLst>
+              </p:cTn>
+              <p:prevCondLst>
+                <p:cond evt="onPrev" delay="0">
+                  <p:tgtEl>
+                    <p:sldTgt/>
+                  </p:tgtEl>
+                </p:cond>
+              </p:prevCondLst>
+              <p:nextCondLst>
+                <p:cond evt="onNext" delay="0">
+                  <p:tgtEl>
+                    <p:sldTgt/>
+                  </p:tgtEl>
+                </p:cond>
+              </p:nextCondLst>
+            </p:seq>
+            <p:audio>
+              <p:cMediaNode vol="80000">
+                <p:cTn id="7" fill="hold" display="0">
+                  <p:stCondLst>
+                    <p:cond delay="indefinite"/>
+                  </p:stCondLst>
+                  <p:endCondLst>
+                    <p:cond evt="onStopAudio" delay="0">
+                      <p:tgtEl>
+                        <p:sldTgt/>
+                      </p:tgtEl>
+                    </p:cond>
+                  </p:endCondLst>
+                </p:cTn>
+                <p:tgtEl>
+                  <p:spTgt spid="3"/>
+                </p:tgtEl>
+              </p:cMediaNode>
+            </p:audio>
+          </p:childTnLst>
+        </p:cTn>
+      </p:par>
+    </p:tnLst>
+  </p:timing>
 </p:sld>
 </file>
 
@@ -4706,6 +5191,44 @@
           </a:p>
         </p:txBody>
       </p:sp>
+      <p:pic>
+        <p:nvPicPr>
+          <p:cNvPr id="3" name="Recorded Sound">
+            <a:hlinkClick r:id="" action="ppaction://media"/>
+            <a:extLst>
+              <a:ext uri="{FF2B5EF4-FFF2-40B4-BE49-F238E27FC236}">
+                <a16:creationId xmlns:a16="http://schemas.microsoft.com/office/drawing/2014/main" id="{F438141A-D8AB-3FD7-9D1C-9D789B77078D}"/>
+              </a:ext>
+            </a:extLst>
+          </p:cNvPr>
+          <p:cNvPicPr>
+            <a:picLocks noChangeAspect="1"/>
+          </p:cNvPicPr>
+          <p:nvPr>
+            <a:audioFile r:link="rId2"/>
+            <p:extLst>
+              <p:ext uri="{DAA4B4D4-6D71-4841-9C94-3DE7FCFB9230}">
+                <p14:media xmlns:p14="http://schemas.microsoft.com/office/powerpoint/2010/main" r:embed="rId1"/>
+              </p:ext>
+            </p:extLst>
+          </p:nvPr>
+        </p:nvPicPr>
+        <p:blipFill>
+          <a:blip r:embed="rId5"/>
+          <a:stretch>
+            <a:fillRect/>
+          </a:stretch>
+        </p:blipFill>
+        <p:spPr>
+          <a:xfrm>
+            <a:off x="5598695" y="4868779"/>
+            <a:ext cx="609600" cy="609600"/>
+          </a:xfrm>
+          <a:prstGeom prst="rect">
+            <a:avLst/>
+          </a:prstGeom>
+        </p:spPr>
+      </p:pic>
     </p:spTree>
     <p:extLst>
       <p:ext uri="{BB962C8B-B14F-4D97-AF65-F5344CB8AC3E}">
@@ -4716,6 +5239,90 @@
   <p:clrMapOvr>
     <a:masterClrMapping/>
   </p:clrMapOvr>
+  <p:timing>
+    <p:tnLst>
+      <p:par>
+        <p:cTn id="1" dur="indefinite" restart="never" nodeType="tmRoot">
+          <p:childTnLst>
+            <p:seq concurrent="1" nextAc="seek">
+              <p:cTn id="2" dur="indefinite" nodeType="mainSeq">
+                <p:childTnLst>
+                  <p:par>
+                    <p:cTn id="3" fill="hold">
+                      <p:stCondLst>
+                        <p:cond delay="indefinite"/>
+                      </p:stCondLst>
+                      <p:childTnLst>
+                        <p:par>
+                          <p:cTn id="4" fill="hold">
+                            <p:stCondLst>
+                              <p:cond delay="0"/>
+                            </p:stCondLst>
+                            <p:childTnLst>
+                              <p:par>
+                                <p:cTn id="5" presetID="1" presetClass="mediacall" presetSubtype="0" fill="hold" nodeType="clickEffect">
+                                  <p:stCondLst>
+                                    <p:cond delay="0"/>
+                                  </p:stCondLst>
+                                  <p:childTnLst>
+                                    <p:cmd type="call" cmd="playFrom(0.0)">
+                                      <p:cBhvr>
+                                        <p:cTn id="6" dur="36550" fill="hold"/>
+                                        <p:tgtEl>
+                                          <p:spTgt spid="3"/>
+                                        </p:tgtEl>
+                                      </p:cBhvr>
+                                    </p:cmd>
+                                  </p:childTnLst>
+                                </p:cTn>
+                              </p:par>
+                            </p:childTnLst>
+                          </p:cTn>
+                        </p:par>
+                      </p:childTnLst>
+                    </p:cTn>
+                  </p:par>
+                </p:childTnLst>
+              </p:cTn>
+              <p:prevCondLst>
+                <p:cond evt="onPrev" delay="0">
+                  <p:tgtEl>
+                    <p:sldTgt/>
+                  </p:tgtEl>
+                </p:cond>
+              </p:prevCondLst>
+              <p:nextCondLst>
+                <p:cond evt="onNext" delay="0">
+                  <p:tgtEl>
+                    <p:sldTgt/>
+                  </p:tgtEl>
+                </p:cond>
+              </p:nextCondLst>
+            </p:seq>
+            <p:audio>
+              <p:cMediaNode vol="80000">
+                <p:cTn id="7" fill="hold" display="0">
+                  <p:stCondLst>
+                    <p:cond delay="indefinite"/>
+                  </p:stCondLst>
+                  <p:endCondLst>
+                    <p:cond evt="onStopAudio" delay="0">
+                      <p:tgtEl>
+                        <p:sldTgt/>
+                      </p:tgtEl>
+                    </p:cond>
+                  </p:endCondLst>
+                </p:cTn>
+                <p:tgtEl>
+                  <p:spTgt spid="3"/>
+                </p:tgtEl>
+              </p:cMediaNode>
+            </p:audio>
+          </p:childTnLst>
+        </p:cTn>
+      </p:par>
+    </p:tnLst>
+  </p:timing>
 </p:sld>
 </file>
 
